--- a/slides/decks/s20-car-t.pptx
+++ b/slides/decks/s20-car-t.pptx
@@ -135,19 +135,19 @@
   <p:extLst>
     <p:ext uri="{521415D9-36F7-43E2-AB2F-B90AF26B5E84}">
       <p14:sectionLst xmlns:p14="http://schemas.microsoft.com/office/powerpoint/2010/main">
-        <p14:section name="Opening" id="{7cbf33b2-6baf-a361-d3f9-24aa07263a1a}">
+        <p14:section name="Opening" id="{00dcc4ff-f394-b524-9e85-4e77958ca3fa}">
           <p14:sldIdLst>
             <p14:sldId id="256"/>
             <p14:sldId id="257"/>
           </p14:sldIdLst>
         </p14:section>
-        <p14:section name="Engineered T cells" id="{9d597205-de2d-b8a3-3f02-3e671774219d}">
+        <p14:section name="Engineered T cells" id="{156400b5-d73d-3cca-dce2-95d07072be28}">
           <p14:sldIdLst>
             <p14:sldId id="258"/>
             <p14:sldId id="259"/>
           </p14:sldIdLst>
         </p14:section>
-        <p14:section name="CAR-T efficacy" id="{b5ebb6ab-d2ad-ba4f-5169-eb9bf7d7671e}">
+        <p14:section name="CAR-T efficacy" id="{0fa99a35-8990-9a99-669c-3686b73f8a56}">
           <p14:sldIdLst>
             <p14:sldId id="260"/>
             <p14:sldId id="261"/>
@@ -157,21 +157,21 @@
             <p14:sldId id="265"/>
           </p14:sldIdLst>
         </p14:section>
-        <p14:section name="Toxicity" id="{fe381380-7bdc-2462-e028-2e831cfe8979}">
+        <p14:section name="Toxicity" id="{e5022ae4-f9b1-aa13-5acc-f808122b7c68}">
           <p14:sldIdLst>
             <p14:sldId id="266"/>
             <p14:sldId id="267"/>
             <p14:sldId id="268"/>
           </p14:sldIdLst>
         </p14:section>
-        <p14:section name="Resistance and future" id="{06aeeca2-ede7-b416-ab62-055a3b195ce6}">
+        <p14:section name="Resistance and future" id="{ade1a77e-80bc-17b3-3302-2fbe3466c0a5}">
           <p14:sldIdLst>
             <p14:sldId id="269"/>
             <p14:sldId id="270"/>
             <p14:sldId id="271"/>
           </p14:sldIdLst>
         </p14:section>
-        <p14:section name="Board questions" id="{321a66a2-e2a0-3c9a-29ab-dda65a1cdf54}">
+        <p14:section name="Board questions" id="{618d9763-6b8c-f0cb-cd4d-8dbd32d59813}">
           <p14:sldIdLst>
             <p14:sldId id="272"/>
             <p14:sldId id="273"/>
@@ -181,14 +181,14 @@
             <p14:sldId id="277"/>
           </p14:sldIdLst>
         </p14:section>
-        <p14:section name="References" id="{374687b8-eda3-9113-2986-e965a57c8dd6}">
+        <p14:section name="References" id="{84941612-f52a-fec7-6b97-53202536787c}">
           <p14:sldIdLst>
             <p14:sldId id="278"/>
             <p14:sldId id="279"/>
             <p14:sldId id="280"/>
           </p14:sldIdLst>
         </p14:section>
-        <p14:section name="Backup" id="{fd45c21c-733d-d683-f445-324c159cf1dd}">
+        <p14:section name="Backup" id="{6e12d447-fd71-8cc5-bed5-3fb394ef71d5}">
           <p14:sldIdLst>
             <p14:sldId id="281"/>
             <p14:sldId id="282"/>
